--- a/AI_for_Operations_Course/Slides/Class_07_Predictive_Maintenance.pptx
+++ b/AI_for_Operations_Course/Slides/Class_07_Predictive_Maintenance.pptx
@@ -2549,6 +2549,10 @@
           </a:solidFill>
           <a:ln/>
         </p:spPr>
+        <p:txBody>
+          <a:bodyPr/>
+          <a:p/>
+        </p:txBody>
       </p:sp>
       <p:sp>
         <p:nvSpPr>
@@ -3101,6 +3105,10 @@
           </a:solidFill>
           <a:ln/>
         </p:spPr>
+        <p:txBody>
+          <a:bodyPr/>
+          <a:p/>
+        </p:txBody>
       </p:sp>
       <p:sp>
         <p:nvSpPr>
@@ -3711,6 +3719,10 @@
           </a:solidFill>
           <a:ln/>
         </p:spPr>
+        <p:txBody>
+          <a:bodyPr/>
+          <a:p/>
+        </p:txBody>
       </p:sp>
       <p:sp>
         <p:nvSpPr>
@@ -4361,6 +4373,10 @@
           </a:solidFill>
           <a:ln/>
         </p:spPr>
+        <p:txBody>
+          <a:bodyPr/>
+          <a:p/>
+        </p:txBody>
       </p:sp>
       <p:sp>
         <p:nvSpPr>
@@ -4913,6 +4929,10 @@
           </a:solidFill>
           <a:ln/>
         </p:spPr>
+        <p:txBody>
+          <a:bodyPr/>
+          <a:p/>
+        </p:txBody>
       </p:sp>
       <p:sp>
         <p:nvSpPr>
@@ -5494,6 +5514,10 @@
           </a:solidFill>
           <a:ln/>
         </p:spPr>
+        <p:txBody>
+          <a:bodyPr/>
+          <a:p/>
+        </p:txBody>
       </p:sp>
       <p:sp>
         <p:nvSpPr>
@@ -6097,6 +6121,10 @@
           </a:solidFill>
           <a:ln/>
         </p:spPr>
+        <p:txBody>
+          <a:bodyPr/>
+          <a:p/>
+        </p:txBody>
       </p:sp>
       <p:sp>
         <p:nvSpPr>
@@ -6827,6 +6855,10 @@
           </a:solidFill>
           <a:ln/>
         </p:spPr>
+        <p:txBody>
+          <a:bodyPr/>
+          <a:p/>
+        </p:txBody>
       </p:sp>
       <p:sp>
         <p:nvSpPr>
@@ -7290,7 +7322,7 @@
                 <a:ea typeface="Calibri" pitchFamily="34" charset="-122"/>
                 <a:cs typeface="Calibri" pitchFamily="34" charset="-120"/>
               </a:rPr>
-              <a:t>www.proxiant.com</a:t>
+              <a:t>proxiant.ai</a:t>
             </a:r>
             <a:endParaRPr lang="en-US" sz="1800" dirty="0"/>
           </a:p>
@@ -7379,6 +7411,10 @@
           </a:solidFill>
           <a:ln/>
         </p:spPr>
+        <p:txBody>
+          <a:bodyPr/>
+          <a:p/>
+        </p:txBody>
       </p:sp>
       <p:sp>
         <p:nvSpPr>
@@ -7782,6 +7818,10 @@
           </a:solidFill>
           <a:ln/>
         </p:spPr>
+        <p:txBody>
+          <a:bodyPr/>
+          <a:p/>
+        </p:txBody>
       </p:sp>
       <p:sp>
         <p:nvSpPr>
@@ -8472,6 +8512,10 @@
           </a:solidFill>
           <a:ln/>
         </p:spPr>
+        <p:txBody>
+          <a:bodyPr/>
+          <a:p/>
+        </p:txBody>
       </p:sp>
       <p:sp>
         <p:nvSpPr>
@@ -9042,6 +9086,10 @@
           </a:solidFill>
           <a:ln/>
         </p:spPr>
+        <p:txBody>
+          <a:bodyPr/>
+          <a:p/>
+        </p:txBody>
       </p:sp>
       <p:sp>
         <p:nvSpPr>
@@ -9583,6 +9631,10 @@
           </a:solidFill>
           <a:ln/>
         </p:spPr>
+        <p:txBody>
+          <a:bodyPr/>
+          <a:p/>
+        </p:txBody>
       </p:sp>
       <p:sp>
         <p:nvSpPr>
@@ -10193,6 +10245,10 @@
           </a:solidFill>
           <a:ln/>
         </p:spPr>
+        <p:txBody>
+          <a:bodyPr/>
+          <a:p/>
+        </p:txBody>
       </p:sp>
       <p:sp>
         <p:nvSpPr>
@@ -10763,6 +10819,10 @@
           </a:solidFill>
           <a:ln/>
         </p:spPr>
+        <p:txBody>
+          <a:bodyPr/>
+          <a:p/>
+        </p:txBody>
       </p:sp>
       <p:sp>
         <p:nvSpPr>
@@ -11384,6 +11444,10 @@
           </a:solidFill>
           <a:ln/>
         </p:spPr>
+        <p:txBody>
+          <a:bodyPr/>
+          <a:p/>
+        </p:txBody>
       </p:sp>
       <p:sp>
         <p:nvSpPr>
